--- a/assets/pptx/catalog-276.pptx
+++ b/assets/pptx/catalog-276.pptx
@@ -3266,7 +3266,7 @@
                 <a:ea typeface="Ebrima"/>
                 <a:cs typeface="Ebrima"/>
               </a:rPr>
-              <a:t>(አሜን) ነገር ግን እግዚአብሔር (አሜን) ጽድቅን አጐናጽፎ</a:t>
+              <a:t>አሜን ነገር ግን እግዚአብሔር አሜን ጽድቅን አጐናጽፎ</a:t>
             </a:r>
           </a:p>
         </p:txBody>
@@ -3333,7 +3333,7 @@
                 <a:ea typeface="Ebrima"/>
                 <a:cs typeface="Ebrima"/>
               </a:rPr>
-              <a:t>(አሜን) ሰውን ለዚህ ያበቃል (አሜን) ሁሉን አሳልፎ</a:t>
+              <a:t>አሜን ሰውን ለዚህ ያበቃል አሜን ሁሉን አሳልፎ</a:t>
             </a:r>
           </a:p>
         </p:txBody>
@@ -3668,7 +3668,7 @@
                 <a:ea typeface="Ebrima"/>
                 <a:cs typeface="Ebrima"/>
               </a:rPr>
-              <a:t>ጐጆን ማን አስወጣት ጌታ ነው ያገዛት (2x)</a:t>
+              <a:t>ጐጆን ማን አስወጣት ጌታ ነው ያገዛት 2x</a:t>
             </a:r>
           </a:p>
         </p:txBody>
@@ -3735,7 +3735,7 @@
                 <a:ea typeface="Ebrima"/>
                 <a:cs typeface="Ebrima"/>
               </a:rPr>
-              <a:t>ምህረቱ ብዙ ነው ምህረቱ የጌታ በእርሱ ተጀምሯል የሙሽሪት ቤቷ (4x)</a:t>
+              <a:t>ምህረቱ ብዙ ነው ምህረቱ የጌታ በእርሱ ተጀምሯል የሙሽሪት ቤቷ 4x</a:t>
             </a:r>
           </a:p>
         </p:txBody>
@@ -4070,7 +4070,7 @@
                 <a:ea typeface="Ebrima"/>
                 <a:cs typeface="Ebrima"/>
               </a:rPr>
-              <a:t>ቃሉን ላላጠፈው ምሥጋናችን ይሄው (2x)</a:t>
+              <a:t>ቃሉን ላላጠፈው ምሥጋናችን ይሄው 2x</a:t>
             </a:r>
           </a:p>
         </p:txBody>
@@ -4137,7 +4137,7 @@
                 <a:ea typeface="Ebrima"/>
                 <a:cs typeface="Ebrima"/>
               </a:rPr>
-              <a:t>ምህረቱ ብዙ ነው የእግዚአብሔር ምህረቱ በእርሱ ተጀምሯል የሙሽራው ቤቱ (4x)</a:t>
+              <a:t>ምህረቱ ብዙ ነው የእግዚአብሔር ምህረቱ በእርሱ ተጀምሯል የሙሽራው ቤቱ 4x</a:t>
             </a:r>
           </a:p>
         </p:txBody>
@@ -4204,7 +4204,7 @@
                 <a:ea typeface="Ebrima"/>
                 <a:cs typeface="Ebrima"/>
               </a:rPr>
-              <a:t>(አሜን) ፍቅር ግን እስከሞት (አሜን) ብርቱ ስለሆነ</a:t>
+              <a:t>አሜን ፍቅር ግን እስከሞት አሜን ብርቱ ስለሆነ</a:t>
             </a:r>
           </a:p>
         </p:txBody>
@@ -4271,7 +4271,7 @@
                 <a:ea typeface="Ebrima"/>
                 <a:cs typeface="Ebrima"/>
               </a:rPr>
-              <a:t>(አሜን) እርሷም ለእርሱ ሆነች (አሜን) እርሱም ለእርሷ ሆነ</a:t>
+              <a:t>አሜን እርሷም ለእርሱ ሆነች አሜን እርሱም ለእርሷ ሆነ</a:t>
             </a:r>
           </a:p>
         </p:txBody>
@@ -4338,7 +4338,7 @@
                 <a:ea typeface="Ebrima"/>
                 <a:cs typeface="Ebrima"/>
               </a:rPr>
-              <a:t>(አሜን) ጌታ ያነደደውን (አሜን) የፍቅርን እሳት</a:t>
+              <a:t>አሜን ጌታ ያነደደውን አሜን የፍቅርን እሳት</a:t>
             </a:r>
           </a:p>
         </p:txBody>
@@ -4405,7 +4405,7 @@
                 <a:ea typeface="Ebrima"/>
                 <a:cs typeface="Ebrima"/>
               </a:rPr>
-              <a:t>(አሜን) ብዙ የጥፋት ውኃ (አሜን) አይችልም ሊያጠፋት</a:t>
+              <a:t>አሜን ብዙ የጥፋት ውኃ አሜን አይችልም ሊያጠፋት</a:t>
             </a:r>
           </a:p>
         </p:txBody>
@@ -4539,7 +4539,7 @@
                 <a:ea typeface="Ebrima"/>
                 <a:cs typeface="Ebrima"/>
               </a:rPr>
-              <a:t>(አሜን) ልዑል አሰናዳ (አሜን) ባርኮት የሚበላ</a:t>
+              <a:t>አሜን ልዑል አሰናዳ አሜን ባርኮት የሚበላ</a:t>
             </a:r>
           </a:p>
         </p:txBody>
@@ -4606,7 +4606,7 @@
                 <a:ea typeface="Ebrima"/>
                 <a:cs typeface="Ebrima"/>
               </a:rPr>
-              <a:t>(አሜን) ከማመስገን በቀር (አሜን) ምን ይባላል ሌላ</a:t>
+              <a:t>አሜን ከማመስገን በቀር አሜን ምን ይባላል ሌላ</a:t>
             </a:r>
           </a:p>
         </p:txBody>
@@ -4673,7 +4673,7 @@
                 <a:ea typeface="Ebrima"/>
                 <a:cs typeface="Ebrima"/>
               </a:rPr>
-              <a:t>(አሜን) የዘለዓለም አምላክ (አሜን) ወደ እረፍት አመጣን</a:t>
+              <a:t>አሜን የዘለዓለም አምላክ አሜን ወደ እረፍት አመጣን</a:t>
             </a:r>
           </a:p>
         </p:txBody>
@@ -4740,7 +4740,7 @@
                 <a:ea typeface="Ebrima"/>
                 <a:cs typeface="Ebrima"/>
               </a:rPr>
-              <a:t>(አሜን) ከብቸኝነቱ (አሜን) መንደር እያወጣ</a:t>
+              <a:t>አሜን ከብቸኝነቱ አሜን መንደር እያወጣ</a:t>
             </a:r>
           </a:p>
         </p:txBody>
@@ -4874,7 +4874,7 @@
                 <a:ea typeface="Ebrima"/>
                 <a:cs typeface="Ebrima"/>
               </a:rPr>
-              <a:t>(አሜን) አክሊል የለበሰ (አሜን) ሙሽራው ሲያምርበት</a:t>
+              <a:t>አሜን አክሊል የለበሰ አሜን ሙሽራው ሲያምርበት</a:t>
             </a:r>
           </a:p>
         </p:txBody>
@@ -4941,7 +4941,7 @@
                 <a:ea typeface="Ebrima"/>
                 <a:cs typeface="Ebrima"/>
               </a:rPr>
-              <a:t>(አሜን) በጌጥ ሽልማቷ (አሜን) ሙሽሪት ሲያምርባት</a:t>
+              <a:t>አሜን በጌጥ ሽልማቷ አሜን ሙሽሪት ሲያምርባት</a:t>
             </a:r>
           </a:p>
         </p:txBody>
